--- a/军民融合/ppt/研究意义.pptx
+++ b/军民融合/ppt/研究意义.pptx
@@ -5233,6 +5233,106 @@
           </a:prstGeom>
         </p:spPr>
       </p:pic>
+      <p:sp>
+        <p:nvSpPr>
+          <p:cNvPr id="2" name="文本框 1"/>
+          <p:cNvSpPr txBox="1"/>
+          <p:nvPr/>
+        </p:nvSpPr>
+        <p:spPr>
+          <a:xfrm>
+            <a:off x="7084695" y="2900680"/>
+            <a:ext cx="873125" cy="227965"/>
+          </a:xfrm>
+          <a:prstGeom prst="rect">
+            <a:avLst/>
+          </a:prstGeom>
+          <a:solidFill>
+            <a:schemeClr val="bg1"/>
+          </a:solidFill>
+        </p:spPr>
+        <p:txBody>
+          <a:bodyPr wrap="square" rtlCol="0">
+            <a:noAutofit/>
+          </a:bodyPr>
+          <a:p>
+            <a:pPr algn="ctr"/>
+            <a:r>
+              <a:rPr lang="zh-CN" altLang="en-US" sz="900" b="1"/>
+              <a:t>频谱接收设备</a:t>
+            </a:r>
+            <a:endParaRPr lang="zh-CN" altLang="en-US" sz="900" b="1"/>
+          </a:p>
+        </p:txBody>
+      </p:sp>
+      <p:sp>
+        <p:nvSpPr>
+          <p:cNvPr id="3" name="文本框 2"/>
+          <p:cNvSpPr txBox="1"/>
+          <p:nvPr/>
+        </p:nvSpPr>
+        <p:spPr>
+          <a:xfrm>
+            <a:off x="7995285" y="2900680"/>
+            <a:ext cx="873125" cy="227965"/>
+          </a:xfrm>
+          <a:prstGeom prst="rect">
+            <a:avLst/>
+          </a:prstGeom>
+          <a:solidFill>
+            <a:schemeClr val="bg1"/>
+          </a:solidFill>
+        </p:spPr>
+        <p:txBody>
+          <a:bodyPr wrap="square" rtlCol="0">
+            <a:noAutofit/>
+          </a:bodyPr>
+          <a:p>
+            <a:pPr algn="ctr"/>
+            <a:r>
+              <a:rPr lang="zh-CN" altLang="en-US" sz="900" b="1"/>
+              <a:t>存储</a:t>
+            </a:r>
+            <a:r>
+              <a:rPr lang="zh-CN" altLang="en-US" sz="900" b="1"/>
+              <a:t>设备</a:t>
+            </a:r>
+            <a:endParaRPr lang="zh-CN" altLang="en-US" sz="900" b="1"/>
+          </a:p>
+        </p:txBody>
+      </p:sp>
+      <p:sp>
+        <p:nvSpPr>
+          <p:cNvPr id="4" name="文本框 3"/>
+          <p:cNvSpPr txBox="1"/>
+          <p:nvPr/>
+        </p:nvSpPr>
+        <p:spPr>
+          <a:xfrm>
+            <a:off x="8926830" y="2900680"/>
+            <a:ext cx="757555" cy="227965"/>
+          </a:xfrm>
+          <a:prstGeom prst="rect">
+            <a:avLst/>
+          </a:prstGeom>
+          <a:solidFill>
+            <a:schemeClr val="bg1"/>
+          </a:solidFill>
+        </p:spPr>
+        <p:txBody>
+          <a:bodyPr wrap="square" rtlCol="0">
+            <a:noAutofit/>
+          </a:bodyPr>
+          <a:p>
+            <a:pPr algn="ctr"/>
+            <a:r>
+              <a:rPr lang="zh-CN" altLang="en-US" sz="900" b="1"/>
+              <a:t>计算设备</a:t>
+            </a:r>
+            <a:endParaRPr lang="zh-CN" altLang="en-US" sz="900" b="1"/>
+          </a:p>
+        </p:txBody>
+      </p:sp>
     </p:spTree>
     <p:custDataLst>
       <p:tags r:id="rId8"/>

--- a/军民融合/ppt/研究意义.pptx
+++ b/军民融合/ppt/研究意义.pptx
@@ -4551,21 +4551,10 @@
                 </a:solidFill>
                 <a:latin typeface="微软雅黑" panose="020B0503020204020204" charset="-122"/>
                 <a:ea typeface="微软雅黑" panose="020B0503020204020204" charset="-122"/>
-                <a:sym typeface="+mn-ea"/>
               </a:rPr>
-              <a:t>海量频谱数据流体量大</a:t>
+              <a:t>海量频谱数据流难管理</a:t>
             </a:r>
             <a:endParaRPr kumimoji="1" lang="zh-CN" altLang="en-US" sz="1335" b="1" dirty="0">
-              <a:solidFill>
-                <a:srgbClr val="2E54A1"/>
-              </a:solidFill>
-              <a:latin typeface="微软雅黑" panose="020B0503020204020204" charset="-122"/>
-              <a:ea typeface="微软雅黑" panose="020B0503020204020204" charset="-122"/>
-            </a:endParaRPr>
-          </a:p>
-          <a:p>
-            <a:pPr algn="ctr"/>
-            <a:endParaRPr kumimoji="1" lang="en-US" altLang="zh-CN" sz="1335" b="1" dirty="0">
               <a:solidFill>
                 <a:srgbClr val="2E54A1"/>
               </a:solidFill>
@@ -4605,9 +4594,8 @@
                 </a:solidFill>
                 <a:latin typeface="微软雅黑" panose="020B0503020204020204" charset="-122"/>
                 <a:ea typeface="微软雅黑" panose="020B0503020204020204" charset="-122"/>
-                <a:sym typeface="+mn-ea"/>
               </a:rPr>
-              <a:t>智能模型终端难部署</a:t>
+              <a:t>端侧智能大模型难部署</a:t>
             </a:r>
             <a:endParaRPr kumimoji="1" lang="zh-CN" altLang="en-US" sz="1335" b="1" dirty="0">
               <a:solidFill>

--- a/军民融合/ppt/研究意义.pptx
+++ b/军民融合/ppt/研究意义.pptx
@@ -112,7 +112,7 @@
             <a:srgbClr val="A4A3A4"/>
           </p15:clr>
         </p15:guide>
-        <p15:guide id="2" pos="3184" userDrawn="1">
+        <p15:guide id="2" pos="3183" userDrawn="1">
           <p15:clr>
             <a:srgbClr val="A4A3A4"/>
           </p15:clr>
@@ -5173,9 +5173,109 @@
           </a:prstGeom>
         </p:spPr>
       </p:pic>
+      <p:sp>
+        <p:nvSpPr>
+          <p:cNvPr id="2" name="文本框 1"/>
+          <p:cNvSpPr txBox="1"/>
+          <p:nvPr/>
+        </p:nvSpPr>
+        <p:spPr>
+          <a:xfrm>
+            <a:off x="7084695" y="2900680"/>
+            <a:ext cx="873125" cy="227965"/>
+          </a:xfrm>
+          <a:prstGeom prst="rect">
+            <a:avLst/>
+          </a:prstGeom>
+          <a:solidFill>
+            <a:schemeClr val="bg1"/>
+          </a:solidFill>
+        </p:spPr>
+        <p:txBody>
+          <a:bodyPr wrap="square" rtlCol="0">
+            <a:noAutofit/>
+          </a:bodyPr>
+          <a:p>
+            <a:pPr algn="ctr"/>
+            <a:r>
+              <a:rPr lang="zh-CN" altLang="en-US" sz="900" b="1"/>
+              <a:t>频谱接收设备</a:t>
+            </a:r>
+            <a:endParaRPr lang="zh-CN" altLang="en-US" sz="900" b="1"/>
+          </a:p>
+        </p:txBody>
+      </p:sp>
+      <p:sp>
+        <p:nvSpPr>
+          <p:cNvPr id="3" name="文本框 2"/>
+          <p:cNvSpPr txBox="1"/>
+          <p:nvPr/>
+        </p:nvSpPr>
+        <p:spPr>
+          <a:xfrm>
+            <a:off x="7995285" y="2900680"/>
+            <a:ext cx="873125" cy="227965"/>
+          </a:xfrm>
+          <a:prstGeom prst="rect">
+            <a:avLst/>
+          </a:prstGeom>
+          <a:solidFill>
+            <a:schemeClr val="bg1"/>
+          </a:solidFill>
+        </p:spPr>
+        <p:txBody>
+          <a:bodyPr wrap="square" rtlCol="0">
+            <a:noAutofit/>
+          </a:bodyPr>
+          <a:p>
+            <a:pPr algn="ctr"/>
+            <a:r>
+              <a:rPr lang="zh-CN" altLang="en-US" sz="900" b="1"/>
+              <a:t>存储</a:t>
+            </a:r>
+            <a:r>
+              <a:rPr lang="zh-CN" altLang="en-US" sz="900" b="1"/>
+              <a:t>设备</a:t>
+            </a:r>
+            <a:endParaRPr lang="zh-CN" altLang="en-US" sz="900" b="1"/>
+          </a:p>
+        </p:txBody>
+      </p:sp>
+      <p:sp>
+        <p:nvSpPr>
+          <p:cNvPr id="4" name="文本框 3"/>
+          <p:cNvSpPr txBox="1"/>
+          <p:nvPr/>
+        </p:nvSpPr>
+        <p:spPr>
+          <a:xfrm>
+            <a:off x="8926830" y="2900680"/>
+            <a:ext cx="757555" cy="227965"/>
+          </a:xfrm>
+          <a:prstGeom prst="rect">
+            <a:avLst/>
+          </a:prstGeom>
+          <a:solidFill>
+            <a:schemeClr val="bg1"/>
+          </a:solidFill>
+        </p:spPr>
+        <p:txBody>
+          <a:bodyPr wrap="square" rtlCol="0">
+            <a:noAutofit/>
+          </a:bodyPr>
+          <a:p>
+            <a:pPr algn="ctr"/>
+            <a:r>
+              <a:rPr lang="zh-CN" altLang="en-US" sz="900" b="1"/>
+              <a:t>计算设备</a:t>
+            </a:r>
+            <a:endParaRPr lang="zh-CN" altLang="en-US" sz="900" b="1"/>
+          </a:p>
+        </p:txBody>
+      </p:sp>
       <p:pic>
         <p:nvPicPr>
-          <p:cNvPr id="123" name="图片 122"/>
+          <p:cNvPr id="6" name="图片 5" descr="ChatGPT Image 2026年6月22日 15_11_53"/>
           <p:cNvPicPr>
             <a:picLocks noChangeAspect="1"/>
           </p:cNvPicPr>
@@ -5189,8 +5289,8 @@
         </p:blipFill>
         <p:spPr>
           <a:xfrm>
-            <a:off x="4262755" y="6598285"/>
-            <a:ext cx="2352675" cy="1504950"/>
+            <a:off x="4311650" y="6618605"/>
+            <a:ext cx="2226945" cy="1484630"/>
           </a:xfrm>
           <a:prstGeom prst="rect">
             <a:avLst/>
@@ -5199,7 +5299,7 @@
       </p:pic>
       <p:pic>
         <p:nvPicPr>
-          <p:cNvPr id="124" name="图片 123"/>
+          <p:cNvPr id="7" name="图片 6" descr="ChatGPT Image 2026年6月22日 15_12_31"/>
           <p:cNvPicPr>
             <a:picLocks noChangeAspect="1"/>
           </p:cNvPicPr>
@@ -5213,114 +5313,14 @@
         </p:blipFill>
         <p:spPr>
           <a:xfrm>
-            <a:off x="7209790" y="6745605"/>
-            <a:ext cx="2443480" cy="1357630"/>
+            <a:off x="7192010" y="6665595"/>
+            <a:ext cx="2440305" cy="1357630"/>
           </a:xfrm>
           <a:prstGeom prst="rect">
             <a:avLst/>
           </a:prstGeom>
         </p:spPr>
       </p:pic>
-      <p:sp>
-        <p:nvSpPr>
-          <p:cNvPr id="2" name="文本框 1"/>
-          <p:cNvSpPr txBox="1"/>
-          <p:nvPr/>
-        </p:nvSpPr>
-        <p:spPr>
-          <a:xfrm>
-            <a:off x="7084695" y="2900680"/>
-            <a:ext cx="873125" cy="227965"/>
-          </a:xfrm>
-          <a:prstGeom prst="rect">
-            <a:avLst/>
-          </a:prstGeom>
-          <a:solidFill>
-            <a:schemeClr val="bg1"/>
-          </a:solidFill>
-        </p:spPr>
-        <p:txBody>
-          <a:bodyPr wrap="square" rtlCol="0">
-            <a:noAutofit/>
-          </a:bodyPr>
-          <a:p>
-            <a:pPr algn="ctr"/>
-            <a:r>
-              <a:rPr lang="zh-CN" altLang="en-US" sz="900" b="1"/>
-              <a:t>频谱接收设备</a:t>
-            </a:r>
-            <a:endParaRPr lang="zh-CN" altLang="en-US" sz="900" b="1"/>
-          </a:p>
-        </p:txBody>
-      </p:sp>
-      <p:sp>
-        <p:nvSpPr>
-          <p:cNvPr id="3" name="文本框 2"/>
-          <p:cNvSpPr txBox="1"/>
-          <p:nvPr/>
-        </p:nvSpPr>
-        <p:spPr>
-          <a:xfrm>
-            <a:off x="7995285" y="2900680"/>
-            <a:ext cx="873125" cy="227965"/>
-          </a:xfrm>
-          <a:prstGeom prst="rect">
-            <a:avLst/>
-          </a:prstGeom>
-          <a:solidFill>
-            <a:schemeClr val="bg1"/>
-          </a:solidFill>
-        </p:spPr>
-        <p:txBody>
-          <a:bodyPr wrap="square" rtlCol="0">
-            <a:noAutofit/>
-          </a:bodyPr>
-          <a:p>
-            <a:pPr algn="ctr"/>
-            <a:r>
-              <a:rPr lang="zh-CN" altLang="en-US" sz="900" b="1"/>
-              <a:t>存储</a:t>
-            </a:r>
-            <a:r>
-              <a:rPr lang="zh-CN" altLang="en-US" sz="900" b="1"/>
-              <a:t>设备</a:t>
-            </a:r>
-            <a:endParaRPr lang="zh-CN" altLang="en-US" sz="900" b="1"/>
-          </a:p>
-        </p:txBody>
-      </p:sp>
-      <p:sp>
-        <p:nvSpPr>
-          <p:cNvPr id="4" name="文本框 3"/>
-          <p:cNvSpPr txBox="1"/>
-          <p:nvPr/>
-        </p:nvSpPr>
-        <p:spPr>
-          <a:xfrm>
-            <a:off x="8926830" y="2900680"/>
-            <a:ext cx="757555" cy="227965"/>
-          </a:xfrm>
-          <a:prstGeom prst="rect">
-            <a:avLst/>
-          </a:prstGeom>
-          <a:solidFill>
-            <a:schemeClr val="bg1"/>
-          </a:solidFill>
-        </p:spPr>
-        <p:txBody>
-          <a:bodyPr wrap="square" rtlCol="0">
-            <a:noAutofit/>
-          </a:bodyPr>
-          <a:p>
-            <a:pPr algn="ctr"/>
-            <a:r>
-              <a:rPr lang="zh-CN" altLang="en-US" sz="900" b="1"/>
-              <a:t>计算设备</a:t>
-            </a:r>
-            <a:endParaRPr lang="zh-CN" altLang="en-US" sz="900" b="1"/>
-          </a:p>
-        </p:txBody>
-      </p:sp>
     </p:spTree>
     <p:custDataLst>
       <p:tags r:id="rId8"/>

--- a/军民融合/ppt/研究意义.pptx
+++ b/军民融合/ppt/研究意义.pptx
@@ -4845,7 +4845,51 @@
                   <a:ea typeface="微软雅黑" panose="020B0503020204020204" charset="-122"/>
                   <a:sym typeface="+mn-ea"/>
                 </a:rPr>
-                <a:t>海杂波干扰下微弱电磁频谱信号传播规律与微弱信号提取</a:t>
+                <a:t>海杂波干扰下微弱电磁</a:t>
+              </a:r>
+              <a:endParaRPr lang="zh-CN" altLang="en-US" sz="1200" b="1" dirty="0">
+                <a:solidFill>
+                  <a:schemeClr val="tx1"/>
+                </a:solidFill>
+                <a:latin typeface="微软雅黑" panose="020B0503020204020204" charset="-122"/>
+                <a:ea typeface="微软雅黑" panose="020B0503020204020204" charset="-122"/>
+                <a:sym typeface="+mn-ea"/>
+              </a:endParaRPr>
+            </a:p>
+            <a:p>
+              <a:pPr algn="ctr"/>
+              <a:r>
+                <a:rPr lang="zh-CN" altLang="en-US" sz="1200" b="1" dirty="0">
+                  <a:solidFill>
+                    <a:schemeClr val="tx1"/>
+                  </a:solidFill>
+                  <a:latin typeface="微软雅黑" panose="020B0503020204020204" charset="-122"/>
+                  <a:ea typeface="微软雅黑" panose="020B0503020204020204" charset="-122"/>
+                  <a:sym typeface="+mn-ea"/>
+                </a:rPr>
+                <a:t>频谱信号传播规律</a:t>
+              </a:r>
+              <a:endParaRPr lang="zh-CN" altLang="en-US" sz="1200" b="1" dirty="0">
+                <a:solidFill>
+                  <a:schemeClr val="tx1"/>
+                </a:solidFill>
+                <a:latin typeface="微软雅黑" panose="020B0503020204020204" charset="-122"/>
+                <a:ea typeface="微软雅黑" panose="020B0503020204020204" charset="-122"/>
+                <a:sym typeface="+mn-ea"/>
+              </a:endParaRPr>
+            </a:p>
+            <a:p>
+              <a:pPr algn="ctr"/>
+              <a:r>
+                <a:rPr lang="zh-CN" altLang="en-US" sz="1200" b="1" dirty="0">
+                  <a:solidFill>
+                    <a:schemeClr val="tx1"/>
+                  </a:solidFill>
+                  <a:latin typeface="微软雅黑" panose="020B0503020204020204" charset="-122"/>
+                  <a:ea typeface="微软雅黑" panose="020B0503020204020204" charset="-122"/>
+                  <a:sym typeface="+mn-ea"/>
+                </a:rPr>
+                <a:t>分析与提取</a:t>
               </a:r>
               <a:endParaRPr lang="zh-CN" altLang="en-US" sz="1200" b="1" dirty="0">
                 <a:solidFill>
@@ -4972,7 +5016,51 @@
                   <a:ea typeface="微软雅黑" panose="020B0503020204020204" charset="-122"/>
                   <a:sym typeface="+mn-ea"/>
                 </a:rPr>
-                <a:t>面向海域自主侦测任务的边缘频谱智能处理方法</a:t>
+                <a:t>基于频谱知识图谱的</a:t>
+              </a:r>
+              <a:endParaRPr lang="zh-CN" altLang="en-US" sz="1200" b="1" dirty="0">
+                <a:solidFill>
+                  <a:schemeClr val="tx1"/>
+                </a:solidFill>
+                <a:latin typeface="微软雅黑" panose="020B0503020204020204" charset="-122"/>
+                <a:ea typeface="微软雅黑" panose="020B0503020204020204" charset="-122"/>
+                <a:sym typeface="+mn-ea"/>
+              </a:endParaRPr>
+            </a:p>
+            <a:p>
+              <a:pPr algn="ctr"/>
+              <a:r>
+                <a:rPr lang="zh-CN" altLang="en-US" sz="1200" b="1" dirty="0">
+                  <a:solidFill>
+                    <a:schemeClr val="tx1"/>
+                  </a:solidFill>
+                  <a:latin typeface="微软雅黑" panose="020B0503020204020204" charset="-122"/>
+                  <a:ea typeface="微软雅黑" panose="020B0503020204020204" charset="-122"/>
+                  <a:sym typeface="+mn-ea"/>
+                </a:rPr>
+                <a:t>轻量化目标识别与</a:t>
+              </a:r>
+              <a:endParaRPr lang="zh-CN" altLang="en-US" sz="1200" b="1" dirty="0">
+                <a:solidFill>
+                  <a:schemeClr val="tx1"/>
+                </a:solidFill>
+                <a:latin typeface="微软雅黑" panose="020B0503020204020204" charset="-122"/>
+                <a:ea typeface="微软雅黑" panose="020B0503020204020204" charset="-122"/>
+                <a:sym typeface="+mn-ea"/>
+              </a:endParaRPr>
+            </a:p>
+            <a:p>
+              <a:pPr algn="ctr"/>
+              <a:r>
+                <a:rPr lang="zh-CN" altLang="en-US" sz="1200" b="1" dirty="0">
+                  <a:solidFill>
+                    <a:schemeClr val="tx1"/>
+                  </a:solidFill>
+                  <a:latin typeface="微软雅黑" panose="020B0503020204020204" charset="-122"/>
+                  <a:ea typeface="微软雅黑" panose="020B0503020204020204" charset="-122"/>
+                  <a:sym typeface="+mn-ea"/>
+                </a:rPr>
+                <a:t>可信协同决策</a:t>
               </a:r>
               <a:endParaRPr lang="zh-CN" altLang="en-US" sz="1200" b="1" dirty="0">
                 <a:solidFill>
@@ -5041,7 +5129,29 @@
                   <a:ea typeface="微软雅黑" panose="020B0503020204020204" charset="-122"/>
                   <a:sym typeface="+mn-ea"/>
                 </a:rPr>
-                <a:t>海杂波场景电磁频谱数据智能处理原型系统验证</a:t>
+                <a:t>海杂波场景电磁频谱数据</a:t>
+              </a:r>
+              <a:endParaRPr lang="zh-CN" altLang="en-US" sz="1200" b="1" dirty="0">
+                <a:solidFill>
+                  <a:schemeClr val="tx1"/>
+                </a:solidFill>
+                <a:latin typeface="微软雅黑" panose="020B0503020204020204" charset="-122"/>
+                <a:ea typeface="微软雅黑" panose="020B0503020204020204" charset="-122"/>
+                <a:sym typeface="+mn-ea"/>
+              </a:endParaRPr>
+            </a:p>
+            <a:p>
+              <a:pPr algn="ctr"/>
+              <a:r>
+                <a:rPr lang="zh-CN" altLang="en-US" sz="1200" b="1" dirty="0">
+                  <a:solidFill>
+                    <a:schemeClr val="tx1"/>
+                  </a:solidFill>
+                  <a:latin typeface="微软雅黑" panose="020B0503020204020204" charset="-122"/>
+                  <a:ea typeface="微软雅黑" panose="020B0503020204020204" charset="-122"/>
+                  <a:sym typeface="+mn-ea"/>
+                </a:rPr>
+                <a:t>智能处理原型系统验证</a:t>
               </a:r>
               <a:endParaRPr lang="zh-CN" altLang="en-US" sz="1200" b="1" dirty="0">
                 <a:solidFill>
@@ -5086,7 +5196,31 @@
                   <a:ea typeface="微软雅黑" panose="020B0503020204020204" charset="-122"/>
                   <a:sym typeface="+mn-ea"/>
                 </a:rPr>
-                <a:t>有限算力端侧频谱数据的轻量存储管理方法</a:t>
+                <a:t>有限算力端侧频谱数据的</a:t>
+              </a:r>
+              <a:endParaRPr lang="zh-CN" altLang="en-US" sz="1200" b="1" spc="-50" dirty="0">
+                <a:solidFill>
+                  <a:schemeClr val="tx1"/>
+                </a:solidFill>
+                <a:uFillTx/>
+                <a:latin typeface="微软雅黑" panose="020B0503020204020204" charset="-122"/>
+                <a:ea typeface="微软雅黑" panose="020B0503020204020204" charset="-122"/>
+                <a:sym typeface="+mn-ea"/>
+              </a:endParaRPr>
+            </a:p>
+            <a:p>
+              <a:pPr algn="ctr"/>
+              <a:r>
+                <a:rPr lang="zh-CN" altLang="en-US" sz="1200" b="1" spc="-50" dirty="0">
+                  <a:solidFill>
+                    <a:schemeClr val="tx1"/>
+                  </a:solidFill>
+                  <a:uFillTx/>
+                  <a:latin typeface="微软雅黑" panose="020B0503020204020204" charset="-122"/>
+                  <a:ea typeface="微软雅黑" panose="020B0503020204020204" charset="-122"/>
+                  <a:sym typeface="+mn-ea"/>
+                </a:rPr>
+                <a:t>轻量存储和可信管理方法</a:t>
               </a:r>
               <a:endParaRPr lang="zh-CN" altLang="en-US" sz="1200" b="1" spc="-50" dirty="0">
                 <a:solidFill>
